--- a/docs/pptx/auc3/ritu-auc3-linsubhr-ratio-sideeffect.pptx
+++ b/docs/pptx/auc3/ritu-auc3-linsubhr-ratio-sideeffect.pptx
@@ -2443,7 +2443,7 @@
           </p:nvSpPr>
           <p:spPr>
             <a:xfrm>
-              <a:off x="1463479" y="2073503"/>
+              <a:off x="1464298" y="2073503"/>
               <a:ext cx="0" cy="3649639"/>
             </a:xfrm>
             <a:custGeom>
@@ -2486,7 +2486,7 @@
           </p:nvSpPr>
           <p:spPr>
             <a:xfrm>
-              <a:off x="3267849" y="2073503"/>
+              <a:off x="3268188" y="2073503"/>
               <a:ext cx="0" cy="3649639"/>
             </a:xfrm>
             <a:custGeom>
@@ -2529,7 +2529,7 @@
           </p:nvSpPr>
           <p:spPr>
             <a:xfrm>
-              <a:off x="5072218" y="2073503"/>
+              <a:off x="5072078" y="2073503"/>
               <a:ext cx="0" cy="3649639"/>
             </a:xfrm>
             <a:custGeom>
@@ -2572,7 +2572,7 @@
           </p:nvSpPr>
           <p:spPr>
             <a:xfrm>
-              <a:off x="6876587" y="2073503"/>
+              <a:off x="6875967" y="2073503"/>
               <a:ext cx="0" cy="3649639"/>
             </a:xfrm>
             <a:custGeom>
@@ -2830,7 +2830,7 @@
           </p:nvSpPr>
           <p:spPr>
             <a:xfrm>
-              <a:off x="2365664" y="2073503"/>
+              <a:off x="2366243" y="2073503"/>
               <a:ext cx="0" cy="3649639"/>
             </a:xfrm>
             <a:custGeom>
@@ -2873,7 +2873,7 @@
           </p:nvSpPr>
           <p:spPr>
             <a:xfrm>
-              <a:off x="4170033" y="2073503"/>
+              <a:off x="4170133" y="2073503"/>
               <a:ext cx="0" cy="3649639"/>
             </a:xfrm>
             <a:custGeom>
@@ -2916,7 +2916,7 @@
           </p:nvSpPr>
           <p:spPr>
             <a:xfrm>
-              <a:off x="5974402" y="2073503"/>
+              <a:off x="5974022" y="2073503"/>
               <a:ext cx="0" cy="3649639"/>
             </a:xfrm>
             <a:custGeom>
@@ -2959,7 +2959,7 @@
           </p:nvSpPr>
           <p:spPr>
             <a:xfrm>
-              <a:off x="7778772" y="2073503"/>
+              <a:off x="7777912" y="2073503"/>
               <a:ext cx="0" cy="3649639"/>
             </a:xfrm>
             <a:custGeom>
@@ -3003,485 +3003,485 @@
           <p:spPr>
             <a:xfrm>
               <a:off x="1172049" y="2073503"/>
-              <a:ext cx="7090630" cy="3474788"/>
+              <a:ext cx="7090630" cy="3476058"/>
             </a:xfrm>
             <a:custGeom>
               <a:avLst/>
               <a:pathLst>
-                <a:path w="7090630" h="3474788">
+                <a:path w="7090630" h="3476058">
                   <a:moveTo>
-                    <a:pt x="1694803" y="0"/>
+                    <a:pt x="1744133" y="0"/>
                   </a:moveTo>
                   <a:lnTo>
-                    <a:pt x="1718940" y="94084"/>
-                  </a:lnTo>
-                  <a:lnTo>
-                    <a:pt x="1790563" y="352016"/>
-                  </a:lnTo>
-                  <a:lnTo>
-                    <a:pt x="1862185" y="590322"/>
-                  </a:lnTo>
-                  <a:lnTo>
-                    <a:pt x="1933808" y="810494"/>
-                  </a:lnTo>
-                  <a:lnTo>
-                    <a:pt x="2005430" y="1013912"/>
-                  </a:lnTo>
-                  <a:lnTo>
-                    <a:pt x="2077053" y="1201851"/>
-                  </a:lnTo>
-                  <a:lnTo>
-                    <a:pt x="2148675" y="1375490"/>
-                  </a:lnTo>
-                  <a:lnTo>
-                    <a:pt x="2220298" y="1535915"/>
-                  </a:lnTo>
-                  <a:lnTo>
-                    <a:pt x="2291920" y="1684133"/>
-                  </a:lnTo>
-                  <a:lnTo>
-                    <a:pt x="2363543" y="1821073"/>
-                  </a:lnTo>
-                  <a:lnTo>
-                    <a:pt x="2435165" y="1947592"/>
-                  </a:lnTo>
-                  <a:lnTo>
-                    <a:pt x="2506788" y="2064484"/>
-                  </a:lnTo>
-                  <a:lnTo>
-                    <a:pt x="2578410" y="2172481"/>
-                  </a:lnTo>
-                  <a:lnTo>
-                    <a:pt x="2650033" y="2272261"/>
-                  </a:lnTo>
-                  <a:lnTo>
-                    <a:pt x="2721655" y="2364447"/>
-                  </a:lnTo>
-                  <a:lnTo>
-                    <a:pt x="2793278" y="2449619"/>
-                  </a:lnTo>
-                  <a:lnTo>
-                    <a:pt x="2864901" y="2528310"/>
-                  </a:lnTo>
-                  <a:lnTo>
-                    <a:pt x="2936523" y="2601013"/>
-                  </a:lnTo>
-                  <a:lnTo>
-                    <a:pt x="3008146" y="2647378"/>
-                  </a:lnTo>
-                  <a:lnTo>
-                    <a:pt x="3079768" y="2614268"/>
-                  </a:lnTo>
-                  <a:lnTo>
-                    <a:pt x="3151391" y="2579848"/>
-                  </a:lnTo>
-                  <a:lnTo>
-                    <a:pt x="3223013" y="2544066"/>
-                  </a:lnTo>
-                  <a:lnTo>
-                    <a:pt x="3294636" y="2506867"/>
-                  </a:lnTo>
-                  <a:lnTo>
-                    <a:pt x="3366258" y="2468195"/>
-                  </a:lnTo>
-                  <a:lnTo>
-                    <a:pt x="3437881" y="2427993"/>
-                  </a:lnTo>
-                  <a:lnTo>
-                    <a:pt x="3509503" y="2386199"/>
-                  </a:lnTo>
-                  <a:lnTo>
-                    <a:pt x="3581126" y="2342750"/>
-                  </a:lnTo>
-                  <a:lnTo>
-                    <a:pt x="3652748" y="2297581"/>
-                  </a:lnTo>
-                  <a:lnTo>
-                    <a:pt x="3724371" y="2250625"/>
-                  </a:lnTo>
-                  <a:lnTo>
-                    <a:pt x="3795993" y="2201809"/>
-                  </a:lnTo>
-                  <a:lnTo>
-                    <a:pt x="3867616" y="2151061"/>
-                  </a:lnTo>
-                  <a:lnTo>
-                    <a:pt x="3939238" y="2098304"/>
-                  </a:lnTo>
-                  <a:lnTo>
-                    <a:pt x="4010861" y="2043459"/>
-                  </a:lnTo>
-                  <a:lnTo>
-                    <a:pt x="4082483" y="1986442"/>
-                  </a:lnTo>
-                  <a:lnTo>
-                    <a:pt x="4154106" y="1927169"/>
-                  </a:lnTo>
-                  <a:lnTo>
-                    <a:pt x="4225729" y="1865549"/>
-                  </a:lnTo>
-                  <a:lnTo>
-                    <a:pt x="4297351" y="1801489"/>
-                  </a:lnTo>
-                  <a:lnTo>
-                    <a:pt x="4368974" y="1734894"/>
-                  </a:lnTo>
-                  <a:lnTo>
-                    <a:pt x="4440596" y="1665662"/>
-                  </a:lnTo>
-                  <a:lnTo>
-                    <a:pt x="4512219" y="1593689"/>
-                  </a:lnTo>
-                  <a:lnTo>
-                    <a:pt x="4583841" y="1518868"/>
-                  </a:lnTo>
-                  <a:lnTo>
-                    <a:pt x="4655464" y="1441084"/>
-                  </a:lnTo>
-                  <a:lnTo>
-                    <a:pt x="4727086" y="1360222"/>
-                  </a:lnTo>
-                  <a:lnTo>
-                    <a:pt x="4798709" y="1276158"/>
-                  </a:lnTo>
-                  <a:lnTo>
-                    <a:pt x="4870331" y="1188766"/>
-                  </a:lnTo>
-                  <a:lnTo>
-                    <a:pt x="4941954" y="1097915"/>
-                  </a:lnTo>
-                  <a:lnTo>
-                    <a:pt x="5013576" y="1003467"/>
-                  </a:lnTo>
-                  <a:lnTo>
-                    <a:pt x="5085199" y="905280"/>
-                  </a:lnTo>
-                  <a:lnTo>
-                    <a:pt x="5156821" y="803207"/>
-                  </a:lnTo>
-                  <a:lnTo>
-                    <a:pt x="5228444" y="697093"/>
-                  </a:lnTo>
-                  <a:lnTo>
-                    <a:pt x="5300066" y="586777"/>
-                  </a:lnTo>
-                  <a:lnTo>
-                    <a:pt x="5371689" y="472095"/>
-                  </a:lnTo>
-                  <a:lnTo>
-                    <a:pt x="5443311" y="352873"/>
-                  </a:lnTo>
-                  <a:lnTo>
-                    <a:pt x="5514934" y="228932"/>
-                  </a:lnTo>
-                  <a:lnTo>
-                    <a:pt x="5586557" y="100083"/>
-                  </a:lnTo>
-                  <a:lnTo>
-                    <a:pt x="5640071" y="0"/>
+                    <a:pt x="1790563" y="182689"/>
+                  </a:lnTo>
+                  <a:lnTo>
+                    <a:pt x="1862185" y="442340"/>
+                  </a:lnTo>
+                  <a:lnTo>
+                    <a:pt x="1933808" y="681567"/>
+                  </a:lnTo>
+                  <a:lnTo>
+                    <a:pt x="2005430" y="901977"/>
+                  </a:lnTo>
+                  <a:lnTo>
+                    <a:pt x="2077053" y="1105051"/>
+                  </a:lnTo>
+                  <a:lnTo>
+                    <a:pt x="2148675" y="1292151"/>
+                  </a:lnTo>
+                  <a:lnTo>
+                    <a:pt x="2220298" y="1464535"/>
+                  </a:lnTo>
+                  <a:lnTo>
+                    <a:pt x="2291920" y="1623360"/>
+                  </a:lnTo>
+                  <a:lnTo>
+                    <a:pt x="2363543" y="1769692"/>
+                  </a:lnTo>
+                  <a:lnTo>
+                    <a:pt x="2435165" y="1904514"/>
+                  </a:lnTo>
+                  <a:lnTo>
+                    <a:pt x="2506788" y="2028731"/>
+                  </a:lnTo>
+                  <a:lnTo>
+                    <a:pt x="2578410" y="2143178"/>
+                  </a:lnTo>
+                  <a:lnTo>
+                    <a:pt x="2650033" y="2248622"/>
+                  </a:lnTo>
+                  <a:lnTo>
+                    <a:pt x="2721655" y="2345773"/>
+                  </a:lnTo>
+                  <a:lnTo>
+                    <a:pt x="2793278" y="2435283"/>
+                  </a:lnTo>
+                  <a:lnTo>
+                    <a:pt x="2864901" y="2517751"/>
+                  </a:lnTo>
+                  <a:lnTo>
+                    <a:pt x="2936523" y="2593733"/>
+                  </a:lnTo>
+                  <a:lnTo>
+                    <a:pt x="3008146" y="2649822"/>
+                  </a:lnTo>
+                  <a:lnTo>
+                    <a:pt x="3079768" y="2617243"/>
+                  </a:lnTo>
+                  <a:lnTo>
+                    <a:pt x="3151391" y="2583390"/>
+                  </a:lnTo>
+                  <a:lnTo>
+                    <a:pt x="3223013" y="2548216"/>
+                  </a:lnTo>
+                  <a:lnTo>
+                    <a:pt x="3294636" y="2511667"/>
+                  </a:lnTo>
+                  <a:lnTo>
+                    <a:pt x="3366258" y="2473690"/>
+                  </a:lnTo>
+                  <a:lnTo>
+                    <a:pt x="3437881" y="2434229"/>
+                  </a:lnTo>
+                  <a:lnTo>
+                    <a:pt x="3509503" y="2393227"/>
+                  </a:lnTo>
+                  <a:lnTo>
+                    <a:pt x="3581126" y="2350623"/>
+                  </a:lnTo>
+                  <a:lnTo>
+                    <a:pt x="3652748" y="2306355"/>
+                  </a:lnTo>
+                  <a:lnTo>
+                    <a:pt x="3724371" y="2260357"/>
+                  </a:lnTo>
+                  <a:lnTo>
+                    <a:pt x="3795993" y="2212562"/>
+                  </a:lnTo>
+                  <a:lnTo>
+                    <a:pt x="3867616" y="2162900"/>
+                  </a:lnTo>
+                  <a:lnTo>
+                    <a:pt x="3939238" y="2111298"/>
+                  </a:lnTo>
+                  <a:lnTo>
+                    <a:pt x="4010861" y="2057679"/>
+                  </a:lnTo>
+                  <a:lnTo>
+                    <a:pt x="4082483" y="2001966"/>
+                  </a:lnTo>
+                  <a:lnTo>
+                    <a:pt x="4154106" y="1944077"/>
+                  </a:lnTo>
+                  <a:lnTo>
+                    <a:pt x="4225729" y="1883925"/>
+                  </a:lnTo>
+                  <a:lnTo>
+                    <a:pt x="4297351" y="1821424"/>
+                  </a:lnTo>
+                  <a:lnTo>
+                    <a:pt x="4368974" y="1756481"/>
+                  </a:lnTo>
+                  <a:lnTo>
+                    <a:pt x="4440596" y="1689001"/>
+                  </a:lnTo>
+                  <a:lnTo>
+                    <a:pt x="4512219" y="1618885"/>
+                  </a:lnTo>
+                  <a:lnTo>
+                    <a:pt x="4583841" y="1546029"/>
+                  </a:lnTo>
+                  <a:lnTo>
+                    <a:pt x="4655464" y="1470327"/>
+                  </a:lnTo>
+                  <a:lnTo>
+                    <a:pt x="4727086" y="1391668"/>
+                  </a:lnTo>
+                  <a:lnTo>
+                    <a:pt x="4798709" y="1309935"/>
+                  </a:lnTo>
+                  <a:lnTo>
+                    <a:pt x="4870331" y="1225010"/>
+                  </a:lnTo>
+                  <a:lnTo>
+                    <a:pt x="4941954" y="1136766"/>
+                  </a:lnTo>
+                  <a:lnTo>
+                    <a:pt x="5013576" y="1045075"/>
+                  </a:lnTo>
+                  <a:lnTo>
+                    <a:pt x="5085199" y="949802"/>
+                  </a:lnTo>
+                  <a:lnTo>
+                    <a:pt x="5156821" y="850807"/>
+                  </a:lnTo>
+                  <a:lnTo>
+                    <a:pt x="5228444" y="747945"/>
+                  </a:lnTo>
+                  <a:lnTo>
+                    <a:pt x="5300066" y="641063"/>
+                  </a:lnTo>
+                  <a:lnTo>
+                    <a:pt x="5371689" y="530007"/>
+                  </a:lnTo>
+                  <a:lnTo>
+                    <a:pt x="5443311" y="414611"/>
+                  </a:lnTo>
+                  <a:lnTo>
+                    <a:pt x="5514934" y="294707"/>
+                  </a:lnTo>
+                  <a:lnTo>
+                    <a:pt x="5586557" y="170119"/>
+                  </a:lnTo>
+                  <a:lnTo>
+                    <a:pt x="5658179" y="40664"/>
+                  </a:lnTo>
+                  <a:lnTo>
+                    <a:pt x="5679831" y="0"/>
                   </a:lnTo>
                   <a:lnTo>
                     <a:pt x="7090630" y="0"/>
                   </a:lnTo>
                   <a:lnTo>
-                    <a:pt x="7090630" y="3474788"/>
-                  </a:lnTo>
-                  <a:lnTo>
-                    <a:pt x="7019007" y="3474050"/>
-                  </a:lnTo>
-                  <a:lnTo>
-                    <a:pt x="6947385" y="3473251"/>
-                  </a:lnTo>
-                  <a:lnTo>
-                    <a:pt x="6875762" y="3472387"/>
-                  </a:lnTo>
-                  <a:lnTo>
-                    <a:pt x="6804139" y="3471451"/>
-                  </a:lnTo>
-                  <a:lnTo>
-                    <a:pt x="6732517" y="3470439"/>
-                  </a:lnTo>
-                  <a:lnTo>
-                    <a:pt x="6660894" y="3469343"/>
-                  </a:lnTo>
-                  <a:lnTo>
-                    <a:pt x="6589272" y="3468156"/>
-                  </a:lnTo>
-                  <a:lnTo>
-                    <a:pt x="6517649" y="3466872"/>
-                  </a:lnTo>
-                  <a:lnTo>
-                    <a:pt x="6446027" y="3465483"/>
-                  </a:lnTo>
-                  <a:lnTo>
-                    <a:pt x="6374404" y="3463978"/>
-                  </a:lnTo>
-                  <a:lnTo>
-                    <a:pt x="6302782" y="3462350"/>
-                  </a:lnTo>
-                  <a:lnTo>
-                    <a:pt x="6231159" y="3460588"/>
-                  </a:lnTo>
-                  <a:lnTo>
-                    <a:pt x="6159537" y="3458681"/>
-                  </a:lnTo>
-                  <a:lnTo>
-                    <a:pt x="6087914" y="3456616"/>
-                  </a:lnTo>
-                  <a:lnTo>
-                    <a:pt x="6016292" y="3454382"/>
-                  </a:lnTo>
-                  <a:lnTo>
-                    <a:pt x="5944669" y="3451963"/>
-                  </a:lnTo>
-                  <a:lnTo>
-                    <a:pt x="5873047" y="3449345"/>
-                  </a:lnTo>
-                  <a:lnTo>
-                    <a:pt x="5801424" y="3446512"/>
-                  </a:lnTo>
-                  <a:lnTo>
-                    <a:pt x="5729802" y="3443445"/>
-                  </a:lnTo>
-                  <a:lnTo>
-                    <a:pt x="5658179" y="3440126"/>
-                  </a:lnTo>
-                  <a:lnTo>
-                    <a:pt x="5586557" y="3436534"/>
-                  </a:lnTo>
-                  <a:lnTo>
-                    <a:pt x="5514934" y="3432645"/>
-                  </a:lnTo>
-                  <a:lnTo>
-                    <a:pt x="5443311" y="3428436"/>
-                  </a:lnTo>
-                  <a:lnTo>
-                    <a:pt x="5371689" y="3423881"/>
-                  </a:lnTo>
-                  <a:lnTo>
-                    <a:pt x="5300066" y="3418950"/>
-                  </a:lnTo>
-                  <a:lnTo>
-                    <a:pt x="5228444" y="3413614"/>
-                  </a:lnTo>
-                  <a:lnTo>
-                    <a:pt x="5156821" y="3407838"/>
-                  </a:lnTo>
-                  <a:lnTo>
-                    <a:pt x="5085199" y="3401586"/>
-                  </a:lnTo>
-                  <a:lnTo>
-                    <a:pt x="5013576" y="3394819"/>
-                  </a:lnTo>
-                  <a:lnTo>
-                    <a:pt x="4941954" y="3387495"/>
-                  </a:lnTo>
-                  <a:lnTo>
-                    <a:pt x="4870331" y="3379567"/>
-                  </a:lnTo>
-                  <a:lnTo>
-                    <a:pt x="4798709" y="3370987"/>
-                  </a:lnTo>
-                  <a:lnTo>
-                    <a:pt x="4727086" y="3361700"/>
-                  </a:lnTo>
-                  <a:lnTo>
-                    <a:pt x="4655464" y="3351648"/>
-                  </a:lnTo>
-                  <a:lnTo>
-                    <a:pt x="4583841" y="3340768"/>
-                  </a:lnTo>
-                  <a:lnTo>
-                    <a:pt x="4512219" y="3328992"/>
-                  </a:lnTo>
-                  <a:lnTo>
-                    <a:pt x="4440596" y="3316247"/>
-                  </a:lnTo>
-                  <a:lnTo>
-                    <a:pt x="4368974" y="3302451"/>
-                  </a:lnTo>
-                  <a:lnTo>
-                    <a:pt x="4297351" y="3287520"/>
-                  </a:lnTo>
-                  <a:lnTo>
-                    <a:pt x="4225729" y="3271358"/>
-                  </a:lnTo>
-                  <a:lnTo>
-                    <a:pt x="4154106" y="3253866"/>
-                  </a:lnTo>
-                  <a:lnTo>
-                    <a:pt x="4082483" y="3234932"/>
-                  </a:lnTo>
-                  <a:lnTo>
-                    <a:pt x="4010861" y="3214440"/>
-                  </a:lnTo>
-                  <a:lnTo>
-                    <a:pt x="3939238" y="3192259"/>
-                  </a:lnTo>
-                  <a:lnTo>
-                    <a:pt x="3867616" y="3168252"/>
-                  </a:lnTo>
-                  <a:lnTo>
-                    <a:pt x="3795993" y="3142268"/>
-                  </a:lnTo>
-                  <a:lnTo>
-                    <a:pt x="3724371" y="3114143"/>
-                  </a:lnTo>
-                  <a:lnTo>
-                    <a:pt x="3652748" y="3083702"/>
-                  </a:lnTo>
-                  <a:lnTo>
-                    <a:pt x="3581126" y="3050754"/>
-                  </a:lnTo>
-                  <a:lnTo>
-                    <a:pt x="3509503" y="3015092"/>
-                  </a:lnTo>
-                  <a:lnTo>
-                    <a:pt x="3437881" y="2976494"/>
-                  </a:lnTo>
-                  <a:lnTo>
-                    <a:pt x="3366258" y="2934716"/>
-                  </a:lnTo>
-                  <a:lnTo>
-                    <a:pt x="3294636" y="2889497"/>
-                  </a:lnTo>
-                  <a:lnTo>
-                    <a:pt x="3223013" y="2840554"/>
-                  </a:lnTo>
-                  <a:lnTo>
-                    <a:pt x="3151391" y="2787580"/>
-                  </a:lnTo>
-                  <a:lnTo>
-                    <a:pt x="3079768" y="2730243"/>
-                  </a:lnTo>
-                  <a:lnTo>
-                    <a:pt x="3008146" y="2668184"/>
-                  </a:lnTo>
-                  <a:lnTo>
-                    <a:pt x="2936523" y="2679226"/>
-                  </a:lnTo>
-                  <a:lnTo>
-                    <a:pt x="2864901" y="2709862"/>
-                  </a:lnTo>
-                  <a:lnTo>
-                    <a:pt x="2793278" y="2739331"/>
-                  </a:lnTo>
-                  <a:lnTo>
-                    <a:pt x="2721655" y="2767678"/>
-                  </a:lnTo>
-                  <a:lnTo>
-                    <a:pt x="2650033" y="2794946"/>
-                  </a:lnTo>
-                  <a:lnTo>
-                    <a:pt x="2578410" y="2821175"/>
-                  </a:lnTo>
-                  <a:lnTo>
-                    <a:pt x="2506788" y="2846405"/>
-                  </a:lnTo>
-                  <a:lnTo>
-                    <a:pt x="2435165" y="2870675"/>
-                  </a:lnTo>
-                  <a:lnTo>
-                    <a:pt x="2363543" y="2894020"/>
-                  </a:lnTo>
-                  <a:lnTo>
-                    <a:pt x="2291920" y="2916477"/>
-                  </a:lnTo>
-                  <a:lnTo>
-                    <a:pt x="2220298" y="2938078"/>
-                  </a:lnTo>
-                  <a:lnTo>
-                    <a:pt x="2148675" y="2958857"/>
-                  </a:lnTo>
-                  <a:lnTo>
-                    <a:pt x="2077053" y="2978844"/>
-                  </a:lnTo>
-                  <a:lnTo>
-                    <a:pt x="2005430" y="2998071"/>
-                  </a:lnTo>
-                  <a:lnTo>
-                    <a:pt x="1933808" y="3016565"/>
-                  </a:lnTo>
-                  <a:lnTo>
-                    <a:pt x="1862185" y="3034355"/>
-                  </a:lnTo>
-                  <a:lnTo>
-                    <a:pt x="1790563" y="3051468"/>
-                  </a:lnTo>
-                  <a:lnTo>
-                    <a:pt x="1718940" y="3067929"/>
-                  </a:lnTo>
-                  <a:lnTo>
-                    <a:pt x="1647318" y="3083763"/>
-                  </a:lnTo>
-                  <a:lnTo>
-                    <a:pt x="1575695" y="3098994"/>
-                  </a:lnTo>
-                  <a:lnTo>
-                    <a:pt x="1504073" y="3113645"/>
-                  </a:lnTo>
-                  <a:lnTo>
-                    <a:pt x="1432450" y="3127738"/>
-                  </a:lnTo>
-                  <a:lnTo>
-                    <a:pt x="1360827" y="3141295"/>
-                  </a:lnTo>
-                  <a:lnTo>
-                    <a:pt x="1289205" y="3154335"/>
-                  </a:lnTo>
-                  <a:lnTo>
-                    <a:pt x="1217582" y="3166879"/>
-                  </a:lnTo>
-                  <a:lnTo>
-                    <a:pt x="1145960" y="3178945"/>
-                  </a:lnTo>
-                  <a:lnTo>
-                    <a:pt x="1074337" y="3190552"/>
-                  </a:lnTo>
-                  <a:lnTo>
-                    <a:pt x="1002715" y="3201717"/>
-                  </a:lnTo>
-                  <a:lnTo>
-                    <a:pt x="931092" y="3212456"/>
-                  </a:lnTo>
-                  <a:lnTo>
-                    <a:pt x="859470" y="3222787"/>
-                  </a:lnTo>
-                  <a:lnTo>
-                    <a:pt x="787847" y="3232724"/>
-                  </a:lnTo>
-                  <a:lnTo>
-                    <a:pt x="716225" y="3242283"/>
-                  </a:lnTo>
-                  <a:lnTo>
-                    <a:pt x="644602" y="3251478"/>
-                  </a:lnTo>
-                  <a:lnTo>
-                    <a:pt x="572980" y="3260322"/>
-                  </a:lnTo>
-                  <a:lnTo>
-                    <a:pt x="501357" y="3268830"/>
-                  </a:lnTo>
-                  <a:lnTo>
-                    <a:pt x="429735" y="3277014"/>
-                  </a:lnTo>
-                  <a:lnTo>
-                    <a:pt x="358112" y="3284886"/>
-                  </a:lnTo>
-                  <a:lnTo>
-                    <a:pt x="286490" y="3292459"/>
-                  </a:lnTo>
-                  <a:lnTo>
-                    <a:pt x="214867" y="3299743"/>
-                  </a:lnTo>
-                  <a:lnTo>
-                    <a:pt x="143245" y="3306750"/>
-                  </a:lnTo>
-                  <a:lnTo>
-                    <a:pt x="71622" y="3313490"/>
-                  </a:lnTo>
-                  <a:lnTo>
-                    <a:pt x="0" y="3319973"/>
+                    <a:pt x="7090630" y="3476058"/>
+                  </a:lnTo>
+                  <a:lnTo>
+                    <a:pt x="7019007" y="3475402"/>
+                  </a:lnTo>
+                  <a:lnTo>
+                    <a:pt x="6947385" y="3474689"/>
+                  </a:lnTo>
+                  <a:lnTo>
+                    <a:pt x="6875762" y="3473916"/>
+                  </a:lnTo>
+                  <a:lnTo>
+                    <a:pt x="6804139" y="3473077"/>
+                  </a:lnTo>
+                  <a:lnTo>
+                    <a:pt x="6732517" y="3472166"/>
+                  </a:lnTo>
+                  <a:lnTo>
+                    <a:pt x="6660894" y="3471177"/>
+                  </a:lnTo>
+                  <a:lnTo>
+                    <a:pt x="6589272" y="3470104"/>
+                  </a:lnTo>
+                  <a:lnTo>
+                    <a:pt x="6517649" y="3468939"/>
+                  </a:lnTo>
+                  <a:lnTo>
+                    <a:pt x="6446027" y="3467675"/>
+                  </a:lnTo>
+                  <a:lnTo>
+                    <a:pt x="6374404" y="3466303"/>
+                  </a:lnTo>
+                  <a:lnTo>
+                    <a:pt x="6302782" y="3464814"/>
+                  </a:lnTo>
+                  <a:lnTo>
+                    <a:pt x="6231159" y="3463198"/>
+                  </a:lnTo>
+                  <a:lnTo>
+                    <a:pt x="6159537" y="3461443"/>
+                  </a:lnTo>
+                  <a:lnTo>
+                    <a:pt x="6087914" y="3459539"/>
+                  </a:lnTo>
+                  <a:lnTo>
+                    <a:pt x="6016292" y="3457473"/>
+                  </a:lnTo>
+                  <a:lnTo>
+                    <a:pt x="5944669" y="3455230"/>
+                  </a:lnTo>
+                  <a:lnTo>
+                    <a:pt x="5873047" y="3452795"/>
+                  </a:lnTo>
+                  <a:lnTo>
+                    <a:pt x="5801424" y="3450153"/>
+                  </a:lnTo>
+                  <a:lnTo>
+                    <a:pt x="5729802" y="3447285"/>
+                  </a:lnTo>
+                  <a:lnTo>
+                    <a:pt x="5658179" y="3444172"/>
+                  </a:lnTo>
+                  <a:lnTo>
+                    <a:pt x="5586557" y="3440794"/>
+                  </a:lnTo>
+                  <a:lnTo>
+                    <a:pt x="5514934" y="3437127"/>
+                  </a:lnTo>
+                  <a:lnTo>
+                    <a:pt x="5443311" y="3433147"/>
+                  </a:lnTo>
+                  <a:lnTo>
+                    <a:pt x="5371689" y="3428827"/>
+                  </a:lnTo>
+                  <a:lnTo>
+                    <a:pt x="5300066" y="3424138"/>
+                  </a:lnTo>
+                  <a:lnTo>
+                    <a:pt x="5228444" y="3419050"/>
+                  </a:lnTo>
+                  <a:lnTo>
+                    <a:pt x="5156821" y="3413526"/>
+                  </a:lnTo>
+                  <a:lnTo>
+                    <a:pt x="5085199" y="3407531"/>
+                  </a:lnTo>
+                  <a:lnTo>
+                    <a:pt x="5013576" y="3401025"/>
+                  </a:lnTo>
+                  <a:lnTo>
+                    <a:pt x="4941954" y="3393963"/>
+                  </a:lnTo>
+                  <a:lnTo>
+                    <a:pt x="4870331" y="3386298"/>
+                  </a:lnTo>
+                  <a:lnTo>
+                    <a:pt x="4798709" y="3377978"/>
+                  </a:lnTo>
+                  <a:lnTo>
+                    <a:pt x="4727086" y="3368949"/>
+                  </a:lnTo>
+                  <a:lnTo>
+                    <a:pt x="4655464" y="3359148"/>
+                  </a:lnTo>
+                  <a:lnTo>
+                    <a:pt x="4583841" y="3348511"/>
+                  </a:lnTo>
+                  <a:lnTo>
+                    <a:pt x="4512219" y="3336966"/>
+                  </a:lnTo>
+                  <a:lnTo>
+                    <a:pt x="4440596" y="3324435"/>
+                  </a:lnTo>
+                  <a:lnTo>
+                    <a:pt x="4368974" y="3310834"/>
+                  </a:lnTo>
+                  <a:lnTo>
+                    <a:pt x="4297351" y="3296072"/>
+                  </a:lnTo>
+                  <a:lnTo>
+                    <a:pt x="4225729" y="3280050"/>
+                  </a:lnTo>
+                  <a:lnTo>
+                    <a:pt x="4154106" y="3262660"/>
+                  </a:lnTo>
+                  <a:lnTo>
+                    <a:pt x="4082483" y="3243786"/>
+                  </a:lnTo>
+                  <a:lnTo>
+                    <a:pt x="4010861" y="3223300"/>
+                  </a:lnTo>
+                  <a:lnTo>
+                    <a:pt x="3939238" y="3201065"/>
+                  </a:lnTo>
+                  <a:lnTo>
+                    <a:pt x="3867616" y="3176932"/>
+                  </a:lnTo>
+                  <a:lnTo>
+                    <a:pt x="3795993" y="3150739"/>
+                  </a:lnTo>
+                  <a:lnTo>
+                    <a:pt x="3724371" y="3122310"/>
+                  </a:lnTo>
+                  <a:lnTo>
+                    <a:pt x="3652748" y="3091453"/>
+                  </a:lnTo>
+                  <a:lnTo>
+                    <a:pt x="3581126" y="3057962"/>
+                  </a:lnTo>
+                  <a:lnTo>
+                    <a:pt x="3509503" y="3021612"/>
+                  </a:lnTo>
+                  <a:lnTo>
+                    <a:pt x="3437881" y="2982159"/>
+                  </a:lnTo>
+                  <a:lnTo>
+                    <a:pt x="3366258" y="2939338"/>
+                  </a:lnTo>
+                  <a:lnTo>
+                    <a:pt x="3294636" y="2892860"/>
+                  </a:lnTo>
+                  <a:lnTo>
+                    <a:pt x="3223013" y="2842415"/>
+                  </a:lnTo>
+                  <a:lnTo>
+                    <a:pt x="3151391" y="2787664"/>
+                  </a:lnTo>
+                  <a:lnTo>
+                    <a:pt x="3079768" y="2728238"/>
+                  </a:lnTo>
+                  <a:lnTo>
+                    <a:pt x="3008146" y="2663739"/>
+                  </a:lnTo>
+                  <a:lnTo>
+                    <a:pt x="2936523" y="2681176"/>
+                  </a:lnTo>
+                  <a:lnTo>
+                    <a:pt x="2864901" y="2711352"/>
+                  </a:lnTo>
+                  <a:lnTo>
+                    <a:pt x="2793278" y="2740393"/>
+                  </a:lnTo>
+                  <a:lnTo>
+                    <a:pt x="2721655" y="2768342"/>
+                  </a:lnTo>
+                  <a:lnTo>
+                    <a:pt x="2650033" y="2795240"/>
+                  </a:lnTo>
+                  <a:lnTo>
+                    <a:pt x="2578410" y="2821127"/>
+                  </a:lnTo>
+                  <a:lnTo>
+                    <a:pt x="2506788" y="2846041"/>
+                  </a:lnTo>
+                  <a:lnTo>
+                    <a:pt x="2435165" y="2870018"/>
+                  </a:lnTo>
+                  <a:lnTo>
+                    <a:pt x="2363543" y="2893093"/>
+                  </a:lnTo>
+                  <a:lnTo>
+                    <a:pt x="2291920" y="2915301"/>
+                  </a:lnTo>
+                  <a:lnTo>
+                    <a:pt x="2220298" y="2936674"/>
+                  </a:lnTo>
+                  <a:lnTo>
+                    <a:pt x="2148675" y="2957243"/>
+                  </a:lnTo>
+                  <a:lnTo>
+                    <a:pt x="2077053" y="2977039"/>
+                  </a:lnTo>
+                  <a:lnTo>
+                    <a:pt x="2005430" y="2996091"/>
+                  </a:lnTo>
+                  <a:lnTo>
+                    <a:pt x="1933808" y="3014426"/>
+                  </a:lnTo>
+                  <a:lnTo>
+                    <a:pt x="1862185" y="3032072"/>
+                  </a:lnTo>
+                  <a:lnTo>
+                    <a:pt x="1790563" y="3049054"/>
+                  </a:lnTo>
+                  <a:lnTo>
+                    <a:pt x="1718940" y="3065398"/>
+                  </a:lnTo>
+                  <a:lnTo>
+                    <a:pt x="1647318" y="3081127"/>
+                  </a:lnTo>
+                  <a:lnTo>
+                    <a:pt x="1575695" y="3096265"/>
+                  </a:lnTo>
+                  <a:lnTo>
+                    <a:pt x="1504073" y="3110834"/>
+                  </a:lnTo>
+                  <a:lnTo>
+                    <a:pt x="1432450" y="3124855"/>
+                  </a:lnTo>
+                  <a:lnTo>
+                    <a:pt x="1360827" y="3138349"/>
+                  </a:lnTo>
+                  <a:lnTo>
+                    <a:pt x="1289205" y="3151335"/>
+                  </a:lnTo>
+                  <a:lnTo>
+                    <a:pt x="1217582" y="3163834"/>
+                  </a:lnTo>
+                  <a:lnTo>
+                    <a:pt x="1145960" y="3175862"/>
+                  </a:lnTo>
+                  <a:lnTo>
+                    <a:pt x="1074337" y="3187438"/>
+                  </a:lnTo>
+                  <a:lnTo>
+                    <a:pt x="1002715" y="3198579"/>
+                  </a:lnTo>
+                  <a:lnTo>
+                    <a:pt x="931092" y="3209301"/>
+                  </a:lnTo>
+                  <a:lnTo>
+                    <a:pt x="859470" y="3219620"/>
+                  </a:lnTo>
+                  <a:lnTo>
+                    <a:pt x="787847" y="3229550"/>
+                  </a:lnTo>
+                  <a:lnTo>
+                    <a:pt x="716225" y="3239108"/>
+                  </a:lnTo>
+                  <a:lnTo>
+                    <a:pt x="644602" y="3248306"/>
+                  </a:lnTo>
+                  <a:lnTo>
+                    <a:pt x="572980" y="3257158"/>
+                  </a:lnTo>
+                  <a:lnTo>
+                    <a:pt x="501357" y="3265678"/>
+                  </a:lnTo>
+                  <a:lnTo>
+                    <a:pt x="429735" y="3273877"/>
+                  </a:lnTo>
+                  <a:lnTo>
+                    <a:pt x="358112" y="3281768"/>
+                  </a:lnTo>
+                  <a:lnTo>
+                    <a:pt x="286490" y="3289362"/>
+                  </a:lnTo>
+                  <a:lnTo>
+                    <a:pt x="214867" y="3296670"/>
+                  </a:lnTo>
+                  <a:lnTo>
+                    <a:pt x="143245" y="3303704"/>
+                  </a:lnTo>
+                  <a:lnTo>
+                    <a:pt x="71622" y="3310473"/>
+                  </a:lnTo>
+                  <a:lnTo>
+                    <a:pt x="0" y="3316988"/>
                   </a:lnTo>
                   <a:close/>
                 </a:path>
@@ -3507,183 +3507,183 @@
           </p:nvSpPr>
           <p:spPr>
             <a:xfrm>
-              <a:off x="2866852" y="2073503"/>
-              <a:ext cx="3945268" cy="2647378"/>
+              <a:off x="2916182" y="2073503"/>
+              <a:ext cx="3935698" cy="2649822"/>
             </a:xfrm>
             <a:custGeom>
               <a:avLst/>
               <a:pathLst>
-                <a:path w="3945268" h="2647378">
+                <a:path w="3935698" h="2649822">
                   <a:moveTo>
                     <a:pt x="0" y="0"/>
                   </a:moveTo>
                   <a:lnTo>
-                    <a:pt x="24137" y="94084"/>
-                  </a:lnTo>
-                  <a:lnTo>
-                    <a:pt x="95759" y="352016"/>
-                  </a:lnTo>
-                  <a:lnTo>
-                    <a:pt x="167382" y="590322"/>
-                  </a:lnTo>
-                  <a:lnTo>
-                    <a:pt x="239004" y="810494"/>
-                  </a:lnTo>
-                  <a:lnTo>
-                    <a:pt x="310627" y="1013912"/>
-                  </a:lnTo>
-                  <a:lnTo>
-                    <a:pt x="382249" y="1201851"/>
-                  </a:lnTo>
-                  <a:lnTo>
-                    <a:pt x="453872" y="1375490"/>
-                  </a:lnTo>
-                  <a:lnTo>
-                    <a:pt x="525494" y="1535915"/>
-                  </a:lnTo>
-                  <a:lnTo>
-                    <a:pt x="597117" y="1684133"/>
-                  </a:lnTo>
-                  <a:lnTo>
-                    <a:pt x="668739" y="1821073"/>
-                  </a:lnTo>
-                  <a:lnTo>
-                    <a:pt x="740362" y="1947592"/>
-                  </a:lnTo>
-                  <a:lnTo>
-                    <a:pt x="811985" y="2064484"/>
-                  </a:lnTo>
-                  <a:lnTo>
-                    <a:pt x="883607" y="2172481"/>
-                  </a:lnTo>
-                  <a:lnTo>
-                    <a:pt x="955230" y="2272261"/>
-                  </a:lnTo>
-                  <a:lnTo>
-                    <a:pt x="1026852" y="2364447"/>
-                  </a:lnTo>
-                  <a:lnTo>
-                    <a:pt x="1098475" y="2449619"/>
-                  </a:lnTo>
-                  <a:lnTo>
-                    <a:pt x="1170097" y="2528310"/>
-                  </a:lnTo>
-                  <a:lnTo>
-                    <a:pt x="1241720" y="2601013"/>
-                  </a:lnTo>
-                  <a:lnTo>
-                    <a:pt x="1313342" y="2647378"/>
-                  </a:lnTo>
-                  <a:lnTo>
-                    <a:pt x="1384965" y="2614268"/>
-                  </a:lnTo>
-                  <a:lnTo>
-                    <a:pt x="1456587" y="2579848"/>
-                  </a:lnTo>
-                  <a:lnTo>
-                    <a:pt x="1528210" y="2544066"/>
-                  </a:lnTo>
-                  <a:lnTo>
-                    <a:pt x="1599832" y="2506867"/>
-                  </a:lnTo>
-                  <a:lnTo>
-                    <a:pt x="1671455" y="2468195"/>
-                  </a:lnTo>
-                  <a:lnTo>
-                    <a:pt x="1743077" y="2427993"/>
-                  </a:lnTo>
-                  <a:lnTo>
-                    <a:pt x="1814700" y="2386199"/>
-                  </a:lnTo>
-                  <a:lnTo>
-                    <a:pt x="1886322" y="2342750"/>
-                  </a:lnTo>
-                  <a:lnTo>
-                    <a:pt x="1957945" y="2297581"/>
-                  </a:lnTo>
-                  <a:lnTo>
-                    <a:pt x="2029567" y="2250625"/>
-                  </a:lnTo>
-                  <a:lnTo>
-                    <a:pt x="2101190" y="2201809"/>
-                  </a:lnTo>
-                  <a:lnTo>
-                    <a:pt x="2172813" y="2151061"/>
-                  </a:lnTo>
-                  <a:lnTo>
-                    <a:pt x="2244435" y="2098304"/>
-                  </a:lnTo>
-                  <a:lnTo>
-                    <a:pt x="2316058" y="2043459"/>
-                  </a:lnTo>
-                  <a:lnTo>
-                    <a:pt x="2387680" y="1986442"/>
-                  </a:lnTo>
-                  <a:lnTo>
-                    <a:pt x="2459303" y="1927169"/>
-                  </a:lnTo>
-                  <a:lnTo>
-                    <a:pt x="2530925" y="1865549"/>
-                  </a:lnTo>
-                  <a:lnTo>
-                    <a:pt x="2602548" y="1801489"/>
-                  </a:lnTo>
-                  <a:lnTo>
-                    <a:pt x="2674170" y="1734894"/>
-                  </a:lnTo>
-                  <a:lnTo>
-                    <a:pt x="2745793" y="1665662"/>
-                  </a:lnTo>
-                  <a:lnTo>
-                    <a:pt x="2817415" y="1593689"/>
-                  </a:lnTo>
-                  <a:lnTo>
-                    <a:pt x="2889038" y="1518868"/>
-                  </a:lnTo>
-                  <a:lnTo>
-                    <a:pt x="2960660" y="1441084"/>
-                  </a:lnTo>
-                  <a:lnTo>
-                    <a:pt x="3032283" y="1360222"/>
-                  </a:lnTo>
-                  <a:lnTo>
-                    <a:pt x="3103905" y="1276158"/>
-                  </a:lnTo>
-                  <a:lnTo>
-                    <a:pt x="3175528" y="1188766"/>
-                  </a:lnTo>
-                  <a:lnTo>
-                    <a:pt x="3247150" y="1097915"/>
-                  </a:lnTo>
-                  <a:lnTo>
-                    <a:pt x="3318773" y="1003467"/>
-                  </a:lnTo>
-                  <a:lnTo>
-                    <a:pt x="3390395" y="905280"/>
-                  </a:lnTo>
-                  <a:lnTo>
-                    <a:pt x="3462018" y="803207"/>
-                  </a:lnTo>
-                  <a:lnTo>
-                    <a:pt x="3533641" y="697093"/>
-                  </a:lnTo>
-                  <a:lnTo>
-                    <a:pt x="3605263" y="586777"/>
-                  </a:lnTo>
-                  <a:lnTo>
-                    <a:pt x="3676886" y="472095"/>
-                  </a:lnTo>
-                  <a:lnTo>
-                    <a:pt x="3748508" y="352873"/>
-                  </a:lnTo>
-                  <a:lnTo>
-                    <a:pt x="3820131" y="228932"/>
-                  </a:lnTo>
-                  <a:lnTo>
-                    <a:pt x="3891753" y="100083"/>
-                  </a:lnTo>
-                  <a:lnTo>
-                    <a:pt x="3945268" y="0"/>
+                    <a:pt x="46429" y="182689"/>
+                  </a:lnTo>
+                  <a:lnTo>
+                    <a:pt x="118052" y="442340"/>
+                  </a:lnTo>
+                  <a:lnTo>
+                    <a:pt x="189674" y="681567"/>
+                  </a:lnTo>
+                  <a:lnTo>
+                    <a:pt x="261297" y="901977"/>
+                  </a:lnTo>
+                  <a:lnTo>
+                    <a:pt x="332919" y="1105051"/>
+                  </a:lnTo>
+                  <a:lnTo>
+                    <a:pt x="404542" y="1292151"/>
+                  </a:lnTo>
+                  <a:lnTo>
+                    <a:pt x="476164" y="1464535"/>
+                  </a:lnTo>
+                  <a:lnTo>
+                    <a:pt x="547787" y="1623360"/>
+                  </a:lnTo>
+                  <a:lnTo>
+                    <a:pt x="619409" y="1769692"/>
+                  </a:lnTo>
+                  <a:lnTo>
+                    <a:pt x="691032" y="1904514"/>
+                  </a:lnTo>
+                  <a:lnTo>
+                    <a:pt x="762654" y="2028731"/>
+                  </a:lnTo>
+                  <a:lnTo>
+                    <a:pt x="834277" y="2143178"/>
+                  </a:lnTo>
+                  <a:lnTo>
+                    <a:pt x="905900" y="2248622"/>
+                  </a:lnTo>
+                  <a:lnTo>
+                    <a:pt x="977522" y="2345773"/>
+                  </a:lnTo>
+                  <a:lnTo>
+                    <a:pt x="1049145" y="2435283"/>
+                  </a:lnTo>
+                  <a:lnTo>
+                    <a:pt x="1120767" y="2517751"/>
+                  </a:lnTo>
+                  <a:lnTo>
+                    <a:pt x="1192390" y="2593733"/>
+                  </a:lnTo>
+                  <a:lnTo>
+                    <a:pt x="1264012" y="2649822"/>
+                  </a:lnTo>
+                  <a:lnTo>
+                    <a:pt x="1335635" y="2617243"/>
+                  </a:lnTo>
+                  <a:lnTo>
+                    <a:pt x="1407257" y="2583390"/>
+                  </a:lnTo>
+                  <a:lnTo>
+                    <a:pt x="1478880" y="2548216"/>
+                  </a:lnTo>
+                  <a:lnTo>
+                    <a:pt x="1550502" y="2511667"/>
+                  </a:lnTo>
+                  <a:lnTo>
+                    <a:pt x="1622125" y="2473690"/>
+                  </a:lnTo>
+                  <a:lnTo>
+                    <a:pt x="1693747" y="2434229"/>
+                  </a:lnTo>
+                  <a:lnTo>
+                    <a:pt x="1765370" y="2393227"/>
+                  </a:lnTo>
+                  <a:lnTo>
+                    <a:pt x="1836992" y="2350623"/>
+                  </a:lnTo>
+                  <a:lnTo>
+                    <a:pt x="1908615" y="2306355"/>
+                  </a:lnTo>
+                  <a:lnTo>
+                    <a:pt x="1980237" y="2260357"/>
+                  </a:lnTo>
+                  <a:lnTo>
+                    <a:pt x="2051860" y="2212562"/>
+                  </a:lnTo>
+                  <a:lnTo>
+                    <a:pt x="2123482" y="2162900"/>
+                  </a:lnTo>
+                  <a:lnTo>
+                    <a:pt x="2195105" y="2111298"/>
+                  </a:lnTo>
+                  <a:lnTo>
+                    <a:pt x="2266728" y="2057679"/>
+                  </a:lnTo>
+                  <a:lnTo>
+                    <a:pt x="2338350" y="2001966"/>
+                  </a:lnTo>
+                  <a:lnTo>
+                    <a:pt x="2409973" y="1944077"/>
+                  </a:lnTo>
+                  <a:lnTo>
+                    <a:pt x="2481595" y="1883925"/>
+                  </a:lnTo>
+                  <a:lnTo>
+                    <a:pt x="2553218" y="1821424"/>
+                  </a:lnTo>
+                  <a:lnTo>
+                    <a:pt x="2624840" y="1756481"/>
+                  </a:lnTo>
+                  <a:lnTo>
+                    <a:pt x="2696463" y="1689001"/>
+                  </a:lnTo>
+                  <a:lnTo>
+                    <a:pt x="2768085" y="1618885"/>
+                  </a:lnTo>
+                  <a:lnTo>
+                    <a:pt x="2839708" y="1546029"/>
+                  </a:lnTo>
+                  <a:lnTo>
+                    <a:pt x="2911330" y="1470327"/>
+                  </a:lnTo>
+                  <a:lnTo>
+                    <a:pt x="2982953" y="1391668"/>
+                  </a:lnTo>
+                  <a:lnTo>
+                    <a:pt x="3054575" y="1309935"/>
+                  </a:lnTo>
+                  <a:lnTo>
+                    <a:pt x="3126198" y="1225010"/>
+                  </a:lnTo>
+                  <a:lnTo>
+                    <a:pt x="3197820" y="1136766"/>
+                  </a:lnTo>
+                  <a:lnTo>
+                    <a:pt x="3269443" y="1045075"/>
+                  </a:lnTo>
+                  <a:lnTo>
+                    <a:pt x="3341065" y="949802"/>
+                  </a:lnTo>
+                  <a:lnTo>
+                    <a:pt x="3412688" y="850807"/>
+                  </a:lnTo>
+                  <a:lnTo>
+                    <a:pt x="3484310" y="747945"/>
+                  </a:lnTo>
+                  <a:lnTo>
+                    <a:pt x="3555933" y="641063"/>
+                  </a:lnTo>
+                  <a:lnTo>
+                    <a:pt x="3627556" y="530007"/>
+                  </a:lnTo>
+                  <a:lnTo>
+                    <a:pt x="3699178" y="414611"/>
+                  </a:lnTo>
+                  <a:lnTo>
+                    <a:pt x="3770801" y="294707"/>
+                  </a:lnTo>
+                  <a:lnTo>
+                    <a:pt x="3842423" y="170119"/>
+                  </a:lnTo>
+                  <a:lnTo>
+                    <a:pt x="3914046" y="40664"/>
+                  </a:lnTo>
+                  <a:lnTo>
+                    <a:pt x="3935698" y="0"/>
                   </a:lnTo>
                 </a:path>
               </a:pathLst>
@@ -3703,312 +3703,312 @@
           </p:nvSpPr>
           <p:spPr>
             <a:xfrm>
-              <a:off x="1172049" y="4741687"/>
-              <a:ext cx="7090630" cy="806604"/>
+              <a:off x="1172049" y="4737242"/>
+              <a:ext cx="7090630" cy="812319"/>
             </a:xfrm>
             <a:custGeom>
               <a:avLst/>
               <a:pathLst>
-                <a:path w="7090630" h="806604">
+                <a:path w="7090630" h="812319">
                   <a:moveTo>
-                    <a:pt x="7090630" y="806604"/>
+                    <a:pt x="7090630" y="812319"/>
                   </a:moveTo>
                   <a:lnTo>
-                    <a:pt x="7019007" y="805866"/>
-                  </a:lnTo>
-                  <a:lnTo>
-                    <a:pt x="6947385" y="805067"/>
-                  </a:lnTo>
-                  <a:lnTo>
-                    <a:pt x="6875762" y="804203"/>
-                  </a:lnTo>
-                  <a:lnTo>
-                    <a:pt x="6804139" y="803267"/>
-                  </a:lnTo>
-                  <a:lnTo>
-                    <a:pt x="6732517" y="802255"/>
-                  </a:lnTo>
-                  <a:lnTo>
-                    <a:pt x="6660894" y="801159"/>
-                  </a:lnTo>
-                  <a:lnTo>
-                    <a:pt x="6589272" y="799972"/>
-                  </a:lnTo>
-                  <a:lnTo>
-                    <a:pt x="6517649" y="798688"/>
-                  </a:lnTo>
-                  <a:lnTo>
-                    <a:pt x="6446027" y="797298"/>
-                  </a:lnTo>
-                  <a:lnTo>
-                    <a:pt x="6374404" y="795794"/>
-                  </a:lnTo>
-                  <a:lnTo>
-                    <a:pt x="6302782" y="794166"/>
-                  </a:lnTo>
-                  <a:lnTo>
-                    <a:pt x="6231159" y="792404"/>
-                  </a:lnTo>
-                  <a:lnTo>
-                    <a:pt x="6159537" y="790497"/>
-                  </a:lnTo>
-                  <a:lnTo>
-                    <a:pt x="6087914" y="788432"/>
-                  </a:lnTo>
-                  <a:lnTo>
-                    <a:pt x="6016292" y="786198"/>
-                  </a:lnTo>
-                  <a:lnTo>
-                    <a:pt x="5944669" y="783779"/>
-                  </a:lnTo>
-                  <a:lnTo>
-                    <a:pt x="5873047" y="781161"/>
-                  </a:lnTo>
-                  <a:lnTo>
-                    <a:pt x="5801424" y="778328"/>
-                  </a:lnTo>
-                  <a:lnTo>
-                    <a:pt x="5729802" y="775261"/>
-                  </a:lnTo>
-                  <a:lnTo>
-                    <a:pt x="5658179" y="771942"/>
-                  </a:lnTo>
-                  <a:lnTo>
-                    <a:pt x="5586557" y="768350"/>
-                  </a:lnTo>
-                  <a:lnTo>
-                    <a:pt x="5514934" y="764461"/>
-                  </a:lnTo>
-                  <a:lnTo>
-                    <a:pt x="5443311" y="760252"/>
-                  </a:lnTo>
-                  <a:lnTo>
-                    <a:pt x="5371689" y="755697"/>
-                  </a:lnTo>
-                  <a:lnTo>
-                    <a:pt x="5300066" y="750766"/>
-                  </a:lnTo>
-                  <a:lnTo>
-                    <a:pt x="5228444" y="745430"/>
-                  </a:lnTo>
-                  <a:lnTo>
-                    <a:pt x="5156821" y="739654"/>
-                  </a:lnTo>
-                  <a:lnTo>
-                    <a:pt x="5085199" y="733402"/>
-                  </a:lnTo>
-                  <a:lnTo>
-                    <a:pt x="5013576" y="726635"/>
-                  </a:lnTo>
-                  <a:lnTo>
-                    <a:pt x="4941954" y="719311"/>
-                  </a:lnTo>
-                  <a:lnTo>
-                    <a:pt x="4870331" y="711383"/>
-                  </a:lnTo>
-                  <a:lnTo>
-                    <a:pt x="4798709" y="702803"/>
-                  </a:lnTo>
-                  <a:lnTo>
-                    <a:pt x="4727086" y="693516"/>
-                  </a:lnTo>
-                  <a:lnTo>
-                    <a:pt x="4655464" y="683464"/>
-                  </a:lnTo>
-                  <a:lnTo>
-                    <a:pt x="4583841" y="672584"/>
-                  </a:lnTo>
-                  <a:lnTo>
-                    <a:pt x="4512219" y="660808"/>
-                  </a:lnTo>
-                  <a:lnTo>
-                    <a:pt x="4440596" y="648063"/>
-                  </a:lnTo>
-                  <a:lnTo>
-                    <a:pt x="4368974" y="634267"/>
-                  </a:lnTo>
-                  <a:lnTo>
-                    <a:pt x="4297351" y="619336"/>
-                  </a:lnTo>
-                  <a:lnTo>
-                    <a:pt x="4225729" y="603174"/>
-                  </a:lnTo>
-                  <a:lnTo>
-                    <a:pt x="4154106" y="585682"/>
-                  </a:lnTo>
-                  <a:lnTo>
-                    <a:pt x="4082483" y="566748"/>
-                  </a:lnTo>
-                  <a:lnTo>
-                    <a:pt x="4010861" y="546256"/>
-                  </a:lnTo>
-                  <a:lnTo>
-                    <a:pt x="3939238" y="524075"/>
-                  </a:lnTo>
-                  <a:lnTo>
-                    <a:pt x="3867616" y="500068"/>
-                  </a:lnTo>
-                  <a:lnTo>
-                    <a:pt x="3795993" y="474084"/>
-                  </a:lnTo>
-                  <a:lnTo>
-                    <a:pt x="3724371" y="445959"/>
-                  </a:lnTo>
-                  <a:lnTo>
-                    <a:pt x="3652748" y="415518"/>
-                  </a:lnTo>
-                  <a:lnTo>
-                    <a:pt x="3581126" y="382570"/>
-                  </a:lnTo>
-                  <a:lnTo>
-                    <a:pt x="3509503" y="346908"/>
-                  </a:lnTo>
-                  <a:lnTo>
-                    <a:pt x="3437881" y="308310"/>
-                  </a:lnTo>
-                  <a:lnTo>
-                    <a:pt x="3366258" y="266532"/>
-                  </a:lnTo>
-                  <a:lnTo>
-                    <a:pt x="3294636" y="221313"/>
-                  </a:lnTo>
-                  <a:lnTo>
-                    <a:pt x="3223013" y="172370"/>
-                  </a:lnTo>
-                  <a:lnTo>
-                    <a:pt x="3151391" y="119396"/>
-                  </a:lnTo>
-                  <a:lnTo>
-                    <a:pt x="3079768" y="62059"/>
+                    <a:pt x="7019007" y="811662"/>
+                  </a:lnTo>
+                  <a:lnTo>
+                    <a:pt x="6947385" y="810950"/>
+                  </a:lnTo>
+                  <a:lnTo>
+                    <a:pt x="6875762" y="810177"/>
+                  </a:lnTo>
+                  <a:lnTo>
+                    <a:pt x="6804139" y="809337"/>
+                  </a:lnTo>
+                  <a:lnTo>
+                    <a:pt x="6732517" y="808426"/>
+                  </a:lnTo>
+                  <a:lnTo>
+                    <a:pt x="6660894" y="807438"/>
+                  </a:lnTo>
+                  <a:lnTo>
+                    <a:pt x="6589272" y="806365"/>
+                  </a:lnTo>
+                  <a:lnTo>
+                    <a:pt x="6517649" y="805200"/>
+                  </a:lnTo>
+                  <a:lnTo>
+                    <a:pt x="6446027" y="803936"/>
+                  </a:lnTo>
+                  <a:lnTo>
+                    <a:pt x="6374404" y="802564"/>
+                  </a:lnTo>
+                  <a:lnTo>
+                    <a:pt x="6302782" y="801075"/>
+                  </a:lnTo>
+                  <a:lnTo>
+                    <a:pt x="6231159" y="799458"/>
+                  </a:lnTo>
+                  <a:lnTo>
+                    <a:pt x="6159537" y="797704"/>
+                  </a:lnTo>
+                  <a:lnTo>
+                    <a:pt x="6087914" y="795800"/>
+                  </a:lnTo>
+                  <a:lnTo>
+                    <a:pt x="6016292" y="793733"/>
+                  </a:lnTo>
+                  <a:lnTo>
+                    <a:pt x="5944669" y="791490"/>
+                  </a:lnTo>
+                  <a:lnTo>
+                    <a:pt x="5873047" y="789056"/>
+                  </a:lnTo>
+                  <a:lnTo>
+                    <a:pt x="5801424" y="786414"/>
+                  </a:lnTo>
+                  <a:lnTo>
+                    <a:pt x="5729802" y="783546"/>
+                  </a:lnTo>
+                  <a:lnTo>
+                    <a:pt x="5658179" y="780433"/>
+                  </a:lnTo>
+                  <a:lnTo>
+                    <a:pt x="5586557" y="777054"/>
+                  </a:lnTo>
+                  <a:lnTo>
+                    <a:pt x="5514934" y="773387"/>
+                  </a:lnTo>
+                  <a:lnTo>
+                    <a:pt x="5443311" y="769407"/>
+                  </a:lnTo>
+                  <a:lnTo>
+                    <a:pt x="5371689" y="765088"/>
+                  </a:lnTo>
+                  <a:lnTo>
+                    <a:pt x="5300066" y="760399"/>
+                  </a:lnTo>
+                  <a:lnTo>
+                    <a:pt x="5228444" y="755310"/>
+                  </a:lnTo>
+                  <a:lnTo>
+                    <a:pt x="5156821" y="749787"/>
+                  </a:lnTo>
+                  <a:lnTo>
+                    <a:pt x="5085199" y="743792"/>
+                  </a:lnTo>
+                  <a:lnTo>
+                    <a:pt x="5013576" y="737285"/>
+                  </a:lnTo>
+                  <a:lnTo>
+                    <a:pt x="4941954" y="730223"/>
+                  </a:lnTo>
+                  <a:lnTo>
+                    <a:pt x="4870331" y="722558"/>
+                  </a:lnTo>
+                  <a:lnTo>
+                    <a:pt x="4798709" y="714239"/>
+                  </a:lnTo>
+                  <a:lnTo>
+                    <a:pt x="4727086" y="705209"/>
+                  </a:lnTo>
+                  <a:lnTo>
+                    <a:pt x="4655464" y="695409"/>
+                  </a:lnTo>
+                  <a:lnTo>
+                    <a:pt x="4583841" y="684772"/>
+                  </a:lnTo>
+                  <a:lnTo>
+                    <a:pt x="4512219" y="673227"/>
+                  </a:lnTo>
+                  <a:lnTo>
+                    <a:pt x="4440596" y="660696"/>
+                  </a:lnTo>
+                  <a:lnTo>
+                    <a:pt x="4368974" y="647095"/>
+                  </a:lnTo>
+                  <a:lnTo>
+                    <a:pt x="4297351" y="632333"/>
+                  </a:lnTo>
+                  <a:lnTo>
+                    <a:pt x="4225729" y="616311"/>
+                  </a:lnTo>
+                  <a:lnTo>
+                    <a:pt x="4154106" y="598921"/>
+                  </a:lnTo>
+                  <a:lnTo>
+                    <a:pt x="4082483" y="580047"/>
+                  </a:lnTo>
+                  <a:lnTo>
+                    <a:pt x="4010861" y="559561"/>
+                  </a:lnTo>
+                  <a:lnTo>
+                    <a:pt x="3939238" y="537326"/>
+                  </a:lnTo>
+                  <a:lnTo>
+                    <a:pt x="3867616" y="513193"/>
+                  </a:lnTo>
+                  <a:lnTo>
+                    <a:pt x="3795993" y="487000"/>
+                  </a:lnTo>
+                  <a:lnTo>
+                    <a:pt x="3724371" y="458570"/>
+                  </a:lnTo>
+                  <a:lnTo>
+                    <a:pt x="3652748" y="427714"/>
+                  </a:lnTo>
+                  <a:lnTo>
+                    <a:pt x="3581126" y="394223"/>
+                  </a:lnTo>
+                  <a:lnTo>
+                    <a:pt x="3509503" y="357873"/>
+                  </a:lnTo>
+                  <a:lnTo>
+                    <a:pt x="3437881" y="318420"/>
+                  </a:lnTo>
+                  <a:lnTo>
+                    <a:pt x="3366258" y="275598"/>
+                  </a:lnTo>
+                  <a:lnTo>
+                    <a:pt x="3294636" y="229121"/>
+                  </a:lnTo>
+                  <a:lnTo>
+                    <a:pt x="3223013" y="178676"/>
+                  </a:lnTo>
+                  <a:lnTo>
+                    <a:pt x="3151391" y="123924"/>
+                  </a:lnTo>
+                  <a:lnTo>
+                    <a:pt x="3079768" y="64499"/>
                   </a:lnTo>
                   <a:lnTo>
                     <a:pt x="3008146" y="0"/>
                   </a:lnTo>
                   <a:lnTo>
-                    <a:pt x="2936523" y="11042"/>
-                  </a:lnTo>
-                  <a:lnTo>
-                    <a:pt x="2864901" y="41678"/>
-                  </a:lnTo>
-                  <a:lnTo>
-                    <a:pt x="2793278" y="71147"/>
-                  </a:lnTo>
-                  <a:lnTo>
-                    <a:pt x="2721655" y="99494"/>
-                  </a:lnTo>
-                  <a:lnTo>
-                    <a:pt x="2650033" y="126761"/>
-                  </a:lnTo>
-                  <a:lnTo>
-                    <a:pt x="2578410" y="152991"/>
-                  </a:lnTo>
-                  <a:lnTo>
-                    <a:pt x="2506788" y="178221"/>
-                  </a:lnTo>
-                  <a:lnTo>
-                    <a:pt x="2435165" y="202491"/>
-                  </a:lnTo>
-                  <a:lnTo>
-                    <a:pt x="2363543" y="225836"/>
-                  </a:lnTo>
-                  <a:lnTo>
-                    <a:pt x="2291920" y="248293"/>
-                  </a:lnTo>
-                  <a:lnTo>
-                    <a:pt x="2220298" y="269894"/>
-                  </a:lnTo>
-                  <a:lnTo>
-                    <a:pt x="2148675" y="290673"/>
-                  </a:lnTo>
-                  <a:lnTo>
-                    <a:pt x="2077053" y="310660"/>
-                  </a:lnTo>
-                  <a:lnTo>
-                    <a:pt x="2005430" y="329887"/>
-                  </a:lnTo>
-                  <a:lnTo>
-                    <a:pt x="1933808" y="348381"/>
-                  </a:lnTo>
-                  <a:lnTo>
-                    <a:pt x="1862185" y="366171"/>
-                  </a:lnTo>
-                  <a:lnTo>
-                    <a:pt x="1790563" y="383284"/>
-                  </a:lnTo>
-                  <a:lnTo>
-                    <a:pt x="1718940" y="399745"/>
-                  </a:lnTo>
-                  <a:lnTo>
-                    <a:pt x="1647318" y="415579"/>
-                  </a:lnTo>
-                  <a:lnTo>
-                    <a:pt x="1575695" y="430810"/>
-                  </a:lnTo>
-                  <a:lnTo>
-                    <a:pt x="1504073" y="445461"/>
-                  </a:lnTo>
-                  <a:lnTo>
-                    <a:pt x="1432450" y="459554"/>
-                  </a:lnTo>
-                  <a:lnTo>
-                    <a:pt x="1360827" y="473111"/>
-                  </a:lnTo>
-                  <a:lnTo>
-                    <a:pt x="1289205" y="486151"/>
-                  </a:lnTo>
-                  <a:lnTo>
-                    <a:pt x="1217582" y="498695"/>
-                  </a:lnTo>
-                  <a:lnTo>
-                    <a:pt x="1145960" y="510761"/>
-                  </a:lnTo>
-                  <a:lnTo>
-                    <a:pt x="1074337" y="522368"/>
-                  </a:lnTo>
-                  <a:lnTo>
-                    <a:pt x="1002715" y="533533"/>
-                  </a:lnTo>
-                  <a:lnTo>
-                    <a:pt x="931092" y="544272"/>
-                  </a:lnTo>
-                  <a:lnTo>
-                    <a:pt x="859470" y="554603"/>
-                  </a:lnTo>
-                  <a:lnTo>
-                    <a:pt x="787847" y="564540"/>
-                  </a:lnTo>
-                  <a:lnTo>
-                    <a:pt x="716225" y="574099"/>
-                  </a:lnTo>
-                  <a:lnTo>
-                    <a:pt x="644602" y="583294"/>
-                  </a:lnTo>
-                  <a:lnTo>
-                    <a:pt x="572980" y="592138"/>
-                  </a:lnTo>
-                  <a:lnTo>
-                    <a:pt x="501357" y="600646"/>
-                  </a:lnTo>
-                  <a:lnTo>
-                    <a:pt x="429735" y="608830"/>
-                  </a:lnTo>
-                  <a:lnTo>
-                    <a:pt x="358112" y="616702"/>
-                  </a:lnTo>
-                  <a:lnTo>
-                    <a:pt x="286490" y="624275"/>
-                  </a:lnTo>
-                  <a:lnTo>
-                    <a:pt x="214867" y="631559"/>
-                  </a:lnTo>
-                  <a:lnTo>
-                    <a:pt x="143245" y="638566"/>
-                  </a:lnTo>
-                  <a:lnTo>
-                    <a:pt x="71622" y="645306"/>
-                  </a:lnTo>
-                  <a:lnTo>
-                    <a:pt x="0" y="651789"/>
+                    <a:pt x="2936523" y="17437"/>
+                  </a:lnTo>
+                  <a:lnTo>
+                    <a:pt x="2864901" y="47613"/>
+                  </a:lnTo>
+                  <a:lnTo>
+                    <a:pt x="2793278" y="76654"/>
+                  </a:lnTo>
+                  <a:lnTo>
+                    <a:pt x="2721655" y="104603"/>
+                  </a:lnTo>
+                  <a:lnTo>
+                    <a:pt x="2650033" y="131501"/>
+                  </a:lnTo>
+                  <a:lnTo>
+                    <a:pt x="2578410" y="157388"/>
+                  </a:lnTo>
+                  <a:lnTo>
+                    <a:pt x="2506788" y="182302"/>
+                  </a:lnTo>
+                  <a:lnTo>
+                    <a:pt x="2435165" y="206279"/>
+                  </a:lnTo>
+                  <a:lnTo>
+                    <a:pt x="2363543" y="229354"/>
+                  </a:lnTo>
+                  <a:lnTo>
+                    <a:pt x="2291920" y="251562"/>
+                  </a:lnTo>
+                  <a:lnTo>
+                    <a:pt x="2220298" y="272935"/>
+                  </a:lnTo>
+                  <a:lnTo>
+                    <a:pt x="2148675" y="293504"/>
+                  </a:lnTo>
+                  <a:lnTo>
+                    <a:pt x="2077053" y="313300"/>
+                  </a:lnTo>
+                  <a:lnTo>
+                    <a:pt x="2005430" y="332351"/>
+                  </a:lnTo>
+                  <a:lnTo>
+                    <a:pt x="1933808" y="350686"/>
+                  </a:lnTo>
+                  <a:lnTo>
+                    <a:pt x="1862185" y="368332"/>
+                  </a:lnTo>
+                  <a:lnTo>
+                    <a:pt x="1790563" y="385315"/>
+                  </a:lnTo>
+                  <a:lnTo>
+                    <a:pt x="1718940" y="401659"/>
+                  </a:lnTo>
+                  <a:lnTo>
+                    <a:pt x="1647318" y="417388"/>
+                  </a:lnTo>
+                  <a:lnTo>
+                    <a:pt x="1575695" y="432526"/>
+                  </a:lnTo>
+                  <a:lnTo>
+                    <a:pt x="1504073" y="447095"/>
+                  </a:lnTo>
+                  <a:lnTo>
+                    <a:pt x="1432450" y="461116"/>
+                  </a:lnTo>
+                  <a:lnTo>
+                    <a:pt x="1360827" y="474610"/>
+                  </a:lnTo>
+                  <a:lnTo>
+                    <a:pt x="1289205" y="487596"/>
+                  </a:lnTo>
+                  <a:lnTo>
+                    <a:pt x="1217582" y="500094"/>
+                  </a:lnTo>
+                  <a:lnTo>
+                    <a:pt x="1145960" y="512123"/>
+                  </a:lnTo>
+                  <a:lnTo>
+                    <a:pt x="1074337" y="523699"/>
+                  </a:lnTo>
+                  <a:lnTo>
+                    <a:pt x="1002715" y="534839"/>
+                  </a:lnTo>
+                  <a:lnTo>
+                    <a:pt x="931092" y="545561"/>
+                  </a:lnTo>
+                  <a:lnTo>
+                    <a:pt x="859470" y="555880"/>
+                  </a:lnTo>
+                  <a:lnTo>
+                    <a:pt x="787847" y="565811"/>
+                  </a:lnTo>
+                  <a:lnTo>
+                    <a:pt x="716225" y="575368"/>
+                  </a:lnTo>
+                  <a:lnTo>
+                    <a:pt x="644602" y="584567"/>
+                  </a:lnTo>
+                  <a:lnTo>
+                    <a:pt x="572980" y="593419"/>
+                  </a:lnTo>
+                  <a:lnTo>
+                    <a:pt x="501357" y="601938"/>
+                  </a:lnTo>
+                  <a:lnTo>
+                    <a:pt x="429735" y="610137"/>
+                  </a:lnTo>
+                  <a:lnTo>
+                    <a:pt x="358112" y="618028"/>
+                  </a:lnTo>
+                  <a:lnTo>
+                    <a:pt x="286490" y="625622"/>
+                  </a:lnTo>
+                  <a:lnTo>
+                    <a:pt x="214867" y="632931"/>
+                  </a:lnTo>
+                  <a:lnTo>
+                    <a:pt x="143245" y="639965"/>
+                  </a:lnTo>
+                  <a:lnTo>
+                    <a:pt x="71622" y="646734"/>
+                  </a:lnTo>
+                  <a:lnTo>
+                    <a:pt x="0" y="653249"/>
                   </a:lnTo>
                 </a:path>
               </a:pathLst>
@@ -4028,312 +4028,312 @@
           </p:nvSpPr>
           <p:spPr>
             <a:xfrm>
-              <a:off x="1172049" y="3631206"/>
-              <a:ext cx="7090630" cy="1664313"/>
+              <a:off x="1172049" y="3491385"/>
+              <a:ext cx="7090630" cy="1827175"/>
             </a:xfrm>
             <a:custGeom>
               <a:avLst/>
               <a:pathLst>
-                <a:path w="7090630" h="1664313">
+                <a:path w="7090630" h="1827175">
                   <a:moveTo>
                     <a:pt x="0" y="0"/>
                   </a:moveTo>
                   <a:lnTo>
-                    <a:pt x="71622" y="38441"/>
-                  </a:lnTo>
-                  <a:lnTo>
-                    <a:pt x="143245" y="76115"/>
-                  </a:lnTo>
-                  <a:lnTo>
-                    <a:pt x="214867" y="113038"/>
-                  </a:lnTo>
-                  <a:lnTo>
-                    <a:pt x="286490" y="149223"/>
-                  </a:lnTo>
-                  <a:lnTo>
-                    <a:pt x="358112" y="184686"/>
-                  </a:lnTo>
-                  <a:lnTo>
-                    <a:pt x="429735" y="219442"/>
-                  </a:lnTo>
-                  <a:lnTo>
-                    <a:pt x="501357" y="253504"/>
-                  </a:lnTo>
-                  <a:lnTo>
-                    <a:pt x="572980" y="286886"/>
-                  </a:lnTo>
-                  <a:lnTo>
-                    <a:pt x="644602" y="319601"/>
-                  </a:lnTo>
-                  <a:lnTo>
-                    <a:pt x="716225" y="351664"/>
-                  </a:lnTo>
-                  <a:lnTo>
-                    <a:pt x="787847" y="383087"/>
-                  </a:lnTo>
-                  <a:lnTo>
-                    <a:pt x="859470" y="413882"/>
-                  </a:lnTo>
-                  <a:lnTo>
-                    <a:pt x="931092" y="444063"/>
-                  </a:lnTo>
-                  <a:lnTo>
-                    <a:pt x="1002715" y="473642"/>
-                  </a:lnTo>
-                  <a:lnTo>
-                    <a:pt x="1074337" y="502630"/>
-                  </a:lnTo>
-                  <a:lnTo>
-                    <a:pt x="1145960" y="531040"/>
-                  </a:lnTo>
-                  <a:lnTo>
-                    <a:pt x="1217582" y="558882"/>
-                  </a:lnTo>
-                  <a:lnTo>
-                    <a:pt x="1289205" y="586169"/>
-                  </a:lnTo>
-                  <a:lnTo>
-                    <a:pt x="1360827" y="612911"/>
-                  </a:lnTo>
-                  <a:lnTo>
-                    <a:pt x="1432450" y="639120"/>
-                  </a:lnTo>
-                  <a:lnTo>
-                    <a:pt x="1504073" y="664805"/>
-                  </a:lnTo>
-                  <a:lnTo>
-                    <a:pt x="1575695" y="689978"/>
-                  </a:lnTo>
-                  <a:lnTo>
-                    <a:pt x="1647318" y="714649"/>
-                  </a:lnTo>
-                  <a:lnTo>
-                    <a:pt x="1718940" y="738827"/>
-                  </a:lnTo>
-                  <a:lnTo>
-                    <a:pt x="1790563" y="762522"/>
-                  </a:lnTo>
-                  <a:lnTo>
-                    <a:pt x="1862185" y="785745"/>
-                  </a:lnTo>
-                  <a:lnTo>
-                    <a:pt x="1933808" y="808504"/>
-                  </a:lnTo>
-                  <a:lnTo>
-                    <a:pt x="2005430" y="830808"/>
-                  </a:lnTo>
-                  <a:lnTo>
-                    <a:pt x="2077053" y="852668"/>
-                  </a:lnTo>
-                  <a:lnTo>
-                    <a:pt x="2148675" y="874091"/>
-                  </a:lnTo>
-                  <a:lnTo>
-                    <a:pt x="2220298" y="895087"/>
-                  </a:lnTo>
-                  <a:lnTo>
-                    <a:pt x="2291920" y="915664"/>
-                  </a:lnTo>
-                  <a:lnTo>
-                    <a:pt x="2363543" y="935830"/>
-                  </a:lnTo>
-                  <a:lnTo>
-                    <a:pt x="2435165" y="955593"/>
-                  </a:lnTo>
-                  <a:lnTo>
-                    <a:pt x="2506788" y="974962"/>
-                  </a:lnTo>
-                  <a:lnTo>
-                    <a:pt x="2578410" y="993945"/>
-                  </a:lnTo>
-                  <a:lnTo>
-                    <a:pt x="2650033" y="1012548"/>
-                  </a:lnTo>
-                  <a:lnTo>
-                    <a:pt x="2721655" y="1030781"/>
-                  </a:lnTo>
-                  <a:lnTo>
-                    <a:pt x="2793278" y="1048649"/>
-                  </a:lnTo>
-                  <a:lnTo>
-                    <a:pt x="2864901" y="1066161"/>
-                  </a:lnTo>
-                  <a:lnTo>
-                    <a:pt x="2936523" y="1083323"/>
-                  </a:lnTo>
-                  <a:lnTo>
-                    <a:pt x="3008146" y="1100143"/>
-                  </a:lnTo>
-                  <a:lnTo>
-                    <a:pt x="3079768" y="1116627"/>
-                  </a:lnTo>
-                  <a:lnTo>
-                    <a:pt x="3151391" y="1132782"/>
-                  </a:lnTo>
-                  <a:lnTo>
-                    <a:pt x="3223013" y="1148614"/>
-                  </a:lnTo>
-                  <a:lnTo>
-                    <a:pt x="3294636" y="1164131"/>
-                  </a:lnTo>
-                  <a:lnTo>
-                    <a:pt x="3366258" y="1179338"/>
-                  </a:lnTo>
-                  <a:lnTo>
-                    <a:pt x="3437881" y="1194241"/>
-                  </a:lnTo>
-                  <a:lnTo>
-                    <a:pt x="3509503" y="1208847"/>
-                  </a:lnTo>
-                  <a:lnTo>
-                    <a:pt x="3581126" y="1223161"/>
-                  </a:lnTo>
-                  <a:lnTo>
-                    <a:pt x="3652748" y="1237190"/>
-                  </a:lnTo>
-                  <a:lnTo>
-                    <a:pt x="3724371" y="1250939"/>
-                  </a:lnTo>
-                  <a:lnTo>
-                    <a:pt x="3795993" y="1264413"/>
-                  </a:lnTo>
-                  <a:lnTo>
-                    <a:pt x="3867616" y="1277618"/>
-                  </a:lnTo>
-                  <a:lnTo>
-                    <a:pt x="3939238" y="1290560"/>
-                  </a:lnTo>
-                  <a:lnTo>
-                    <a:pt x="4010861" y="1303244"/>
-                  </a:lnTo>
-                  <a:lnTo>
-                    <a:pt x="4082483" y="1315674"/>
-                  </a:lnTo>
-                  <a:lnTo>
-                    <a:pt x="4154106" y="1327856"/>
-                  </a:lnTo>
-                  <a:lnTo>
-                    <a:pt x="4225729" y="1339795"/>
-                  </a:lnTo>
-                  <a:lnTo>
-                    <a:pt x="4297351" y="1351496"/>
-                  </a:lnTo>
-                  <a:lnTo>
-                    <a:pt x="4368974" y="1362963"/>
-                  </a:lnTo>
-                  <a:lnTo>
-                    <a:pt x="4440596" y="1374202"/>
-                  </a:lnTo>
-                  <a:lnTo>
-                    <a:pt x="4512219" y="1385216"/>
-                  </a:lnTo>
-                  <a:lnTo>
-                    <a:pt x="4583841" y="1396010"/>
-                  </a:lnTo>
-                  <a:lnTo>
-                    <a:pt x="4655464" y="1406589"/>
-                  </a:lnTo>
-                  <a:lnTo>
-                    <a:pt x="4727086" y="1416957"/>
-                  </a:lnTo>
-                  <a:lnTo>
-                    <a:pt x="4798709" y="1427117"/>
-                  </a:lnTo>
-                  <a:lnTo>
-                    <a:pt x="4870331" y="1437075"/>
-                  </a:lnTo>
-                  <a:lnTo>
-                    <a:pt x="4941954" y="1446835"/>
-                  </a:lnTo>
-                  <a:lnTo>
-                    <a:pt x="5013576" y="1456399"/>
-                  </a:lnTo>
-                  <a:lnTo>
-                    <a:pt x="5085199" y="1465773"/>
-                  </a:lnTo>
-                  <a:lnTo>
-                    <a:pt x="5156821" y="1474959"/>
-                  </a:lnTo>
-                  <a:lnTo>
-                    <a:pt x="5228444" y="1483962"/>
-                  </a:lnTo>
-                  <a:lnTo>
-                    <a:pt x="5300066" y="1492786"/>
-                  </a:lnTo>
-                  <a:lnTo>
-                    <a:pt x="5371689" y="1501433"/>
-                  </a:lnTo>
-                  <a:lnTo>
-                    <a:pt x="5443311" y="1509908"/>
-                  </a:lnTo>
-                  <a:lnTo>
-                    <a:pt x="5514934" y="1518213"/>
-                  </a:lnTo>
-                  <a:lnTo>
-                    <a:pt x="5586557" y="1526353"/>
-                  </a:lnTo>
-                  <a:lnTo>
-                    <a:pt x="5658179" y="1534330"/>
-                  </a:lnTo>
-                  <a:lnTo>
-                    <a:pt x="5729802" y="1542148"/>
-                  </a:lnTo>
-                  <a:lnTo>
-                    <a:pt x="5801424" y="1549810"/>
-                  </a:lnTo>
-                  <a:lnTo>
-                    <a:pt x="5873047" y="1557320"/>
-                  </a:lnTo>
-                  <a:lnTo>
-                    <a:pt x="5944669" y="1564679"/>
-                  </a:lnTo>
-                  <a:lnTo>
-                    <a:pt x="6016292" y="1571891"/>
-                  </a:lnTo>
-                  <a:lnTo>
-                    <a:pt x="6087914" y="1578960"/>
-                  </a:lnTo>
-                  <a:lnTo>
-                    <a:pt x="6159537" y="1585887"/>
-                  </a:lnTo>
-                  <a:lnTo>
-                    <a:pt x="6231159" y="1592676"/>
-                  </a:lnTo>
-                  <a:lnTo>
-                    <a:pt x="6302782" y="1599330"/>
-                  </a:lnTo>
-                  <a:lnTo>
-                    <a:pt x="6374404" y="1605851"/>
-                  </a:lnTo>
-                  <a:lnTo>
-                    <a:pt x="6446027" y="1612241"/>
-                  </a:lnTo>
-                  <a:lnTo>
-                    <a:pt x="6517649" y="1618504"/>
-                  </a:lnTo>
-                  <a:lnTo>
-                    <a:pt x="6589272" y="1624643"/>
-                  </a:lnTo>
-                  <a:lnTo>
-                    <a:pt x="6660894" y="1630658"/>
-                  </a:lnTo>
-                  <a:lnTo>
-                    <a:pt x="6732517" y="1636554"/>
-                  </a:lnTo>
-                  <a:lnTo>
-                    <a:pt x="6804139" y="1642332"/>
-                  </a:lnTo>
-                  <a:lnTo>
-                    <a:pt x="6875762" y="1647994"/>
-                  </a:lnTo>
-                  <a:lnTo>
-                    <a:pt x="6947385" y="1653544"/>
-                  </a:lnTo>
-                  <a:lnTo>
-                    <a:pt x="7019007" y="1658982"/>
-                  </a:lnTo>
-                  <a:lnTo>
-                    <a:pt x="7090630" y="1664313"/>
+                    <a:pt x="71622" y="44547"/>
+                  </a:lnTo>
+                  <a:lnTo>
+                    <a:pt x="143245" y="88134"/>
+                  </a:lnTo>
+                  <a:lnTo>
+                    <a:pt x="214867" y="130780"/>
+                  </a:lnTo>
+                  <a:lnTo>
+                    <a:pt x="286490" y="172508"/>
+                  </a:lnTo>
+                  <a:lnTo>
+                    <a:pt x="358112" y="213335"/>
+                  </a:lnTo>
+                  <a:lnTo>
+                    <a:pt x="429735" y="253282"/>
+                  </a:lnTo>
+                  <a:lnTo>
+                    <a:pt x="501357" y="292368"/>
+                  </a:lnTo>
+                  <a:lnTo>
+                    <a:pt x="572980" y="330611"/>
+                  </a:lnTo>
+                  <a:lnTo>
+                    <a:pt x="644602" y="368029"/>
+                  </a:lnTo>
+                  <a:lnTo>
+                    <a:pt x="716225" y="404640"/>
+                  </a:lnTo>
+                  <a:lnTo>
+                    <a:pt x="787847" y="440462"/>
+                  </a:lnTo>
+                  <a:lnTo>
+                    <a:pt x="859470" y="475511"/>
+                  </a:lnTo>
+                  <a:lnTo>
+                    <a:pt x="931092" y="509805"/>
+                  </a:lnTo>
+                  <a:lnTo>
+                    <a:pt x="1002715" y="543359"/>
+                  </a:lnTo>
+                  <a:lnTo>
+                    <a:pt x="1074337" y="576190"/>
+                  </a:lnTo>
+                  <a:lnTo>
+                    <a:pt x="1145960" y="608312"/>
+                  </a:lnTo>
+                  <a:lnTo>
+                    <a:pt x="1217582" y="639742"/>
+                  </a:lnTo>
+                  <a:lnTo>
+                    <a:pt x="1289205" y="670495"/>
+                  </a:lnTo>
+                  <a:lnTo>
+                    <a:pt x="1360827" y="700584"/>
+                  </a:lnTo>
+                  <a:lnTo>
+                    <a:pt x="1432450" y="730024"/>
+                  </a:lnTo>
+                  <a:lnTo>
+                    <a:pt x="1504073" y="758829"/>
+                  </a:lnTo>
+                  <a:lnTo>
+                    <a:pt x="1575695" y="787014"/>
+                  </a:lnTo>
+                  <a:lnTo>
+                    <a:pt x="1647318" y="814590"/>
+                  </a:lnTo>
+                  <a:lnTo>
+                    <a:pt x="1718940" y="841572"/>
+                  </a:lnTo>
+                  <a:lnTo>
+                    <a:pt x="1790563" y="867972"/>
+                  </a:lnTo>
+                  <a:lnTo>
+                    <a:pt x="1862185" y="893803"/>
+                  </a:lnTo>
+                  <a:lnTo>
+                    <a:pt x="1933808" y="919077"/>
+                  </a:lnTo>
+                  <a:lnTo>
+                    <a:pt x="2005430" y="943805"/>
+                  </a:lnTo>
+                  <a:lnTo>
+                    <a:pt x="2077053" y="968001"/>
+                  </a:lnTo>
+                  <a:lnTo>
+                    <a:pt x="2148675" y="991675"/>
+                  </a:lnTo>
+                  <a:lnTo>
+                    <a:pt x="2220298" y="1014838"/>
+                  </a:lnTo>
+                  <a:lnTo>
+                    <a:pt x="2291920" y="1037502"/>
+                  </a:lnTo>
+                  <a:lnTo>
+                    <a:pt x="2363543" y="1059677"/>
+                  </a:lnTo>
+                  <a:lnTo>
+                    <a:pt x="2435165" y="1081374"/>
+                  </a:lnTo>
+                  <a:lnTo>
+                    <a:pt x="2506788" y="1102603"/>
+                  </a:lnTo>
+                  <a:lnTo>
+                    <a:pt x="2578410" y="1123374"/>
+                  </a:lnTo>
+                  <a:lnTo>
+                    <a:pt x="2650033" y="1143698"/>
+                  </a:lnTo>
+                  <a:lnTo>
+                    <a:pt x="2721655" y="1163583"/>
+                  </a:lnTo>
+                  <a:lnTo>
+                    <a:pt x="2793278" y="1183039"/>
+                  </a:lnTo>
+                  <a:lnTo>
+                    <a:pt x="2864901" y="1202076"/>
+                  </a:lnTo>
+                  <a:lnTo>
+                    <a:pt x="2936523" y="1220702"/>
+                  </a:lnTo>
+                  <a:lnTo>
+                    <a:pt x="3008146" y="1238927"/>
+                  </a:lnTo>
+                  <a:lnTo>
+                    <a:pt x="3079768" y="1256759"/>
+                  </a:lnTo>
+                  <a:lnTo>
+                    <a:pt x="3151391" y="1274206"/>
+                  </a:lnTo>
+                  <a:lnTo>
+                    <a:pt x="3223013" y="1291277"/>
+                  </a:lnTo>
+                  <a:lnTo>
+                    <a:pt x="3294636" y="1307980"/>
+                  </a:lnTo>
+                  <a:lnTo>
+                    <a:pt x="3366258" y="1324322"/>
+                  </a:lnTo>
+                  <a:lnTo>
+                    <a:pt x="3437881" y="1340312"/>
+                  </a:lnTo>
+                  <a:lnTo>
+                    <a:pt x="3509503" y="1355958"/>
+                  </a:lnTo>
+                  <a:lnTo>
+                    <a:pt x="3581126" y="1371266"/>
+                  </a:lnTo>
+                  <a:lnTo>
+                    <a:pt x="3652748" y="1386244"/>
+                  </a:lnTo>
+                  <a:lnTo>
+                    <a:pt x="3724371" y="1400899"/>
+                  </a:lnTo>
+                  <a:lnTo>
+                    <a:pt x="3795993" y="1415238"/>
+                  </a:lnTo>
+                  <a:lnTo>
+                    <a:pt x="3867616" y="1429268"/>
+                  </a:lnTo>
+                  <a:lnTo>
+                    <a:pt x="3939238" y="1442995"/>
+                  </a:lnTo>
+                  <a:lnTo>
+                    <a:pt x="4010861" y="1456426"/>
+                  </a:lnTo>
+                  <a:lnTo>
+                    <a:pt x="4082483" y="1469568"/>
+                  </a:lnTo>
+                  <a:lnTo>
+                    <a:pt x="4154106" y="1482426"/>
+                  </a:lnTo>
+                  <a:lnTo>
+                    <a:pt x="4225729" y="1495007"/>
+                  </a:lnTo>
+                  <a:lnTo>
+                    <a:pt x="4297351" y="1507317"/>
+                  </a:lnTo>
+                  <a:lnTo>
+                    <a:pt x="4368974" y="1519361"/>
+                  </a:lnTo>
+                  <a:lnTo>
+                    <a:pt x="4440596" y="1531146"/>
+                  </a:lnTo>
+                  <a:lnTo>
+                    <a:pt x="4512219" y="1542676"/>
+                  </a:lnTo>
+                  <a:lnTo>
+                    <a:pt x="4583841" y="1553958"/>
+                  </a:lnTo>
+                  <a:lnTo>
+                    <a:pt x="4655464" y="1564996"/>
+                  </a:lnTo>
+                  <a:lnTo>
+                    <a:pt x="4727086" y="1575797"/>
+                  </a:lnTo>
+                  <a:lnTo>
+                    <a:pt x="4798709" y="1586364"/>
+                  </a:lnTo>
+                  <a:lnTo>
+                    <a:pt x="4870331" y="1596704"/>
+                  </a:lnTo>
+                  <a:lnTo>
+                    <a:pt x="4941954" y="1606821"/>
+                  </a:lnTo>
+                  <a:lnTo>
+                    <a:pt x="5013576" y="1616719"/>
+                  </a:lnTo>
+                  <a:lnTo>
+                    <a:pt x="5085199" y="1626404"/>
+                  </a:lnTo>
+                  <a:lnTo>
+                    <a:pt x="5156821" y="1635881"/>
+                  </a:lnTo>
+                  <a:lnTo>
+                    <a:pt x="5228444" y="1645153"/>
+                  </a:lnTo>
+                  <a:lnTo>
+                    <a:pt x="5300066" y="1654225"/>
+                  </a:lnTo>
+                  <a:lnTo>
+                    <a:pt x="5371689" y="1663101"/>
+                  </a:lnTo>
+                  <a:lnTo>
+                    <a:pt x="5443311" y="1671786"/>
+                  </a:lnTo>
+                  <a:lnTo>
+                    <a:pt x="5514934" y="1680284"/>
+                  </a:lnTo>
+                  <a:lnTo>
+                    <a:pt x="5586557" y="1688598"/>
+                  </a:lnTo>
+                  <a:lnTo>
+                    <a:pt x="5658179" y="1696733"/>
+                  </a:lnTo>
+                  <a:lnTo>
+                    <a:pt x="5729802" y="1704693"/>
+                  </a:lnTo>
+                  <a:lnTo>
+                    <a:pt x="5801424" y="1712481"/>
+                  </a:lnTo>
+                  <a:lnTo>
+                    <a:pt x="5873047" y="1720101"/>
+                  </a:lnTo>
+                  <a:lnTo>
+                    <a:pt x="5944669" y="1727557"/>
+                  </a:lnTo>
+                  <a:lnTo>
+                    <a:pt x="6016292" y="1734852"/>
+                  </a:lnTo>
+                  <a:lnTo>
+                    <a:pt x="6087914" y="1741990"/>
+                  </a:lnTo>
+                  <a:lnTo>
+                    <a:pt x="6159537" y="1748974"/>
+                  </a:lnTo>
+                  <a:lnTo>
+                    <a:pt x="6231159" y="1755807"/>
+                  </a:lnTo>
+                  <a:lnTo>
+                    <a:pt x="6302782" y="1762493"/>
+                  </a:lnTo>
+                  <a:lnTo>
+                    <a:pt x="6374404" y="1769035"/>
+                  </a:lnTo>
+                  <a:lnTo>
+                    <a:pt x="6446027" y="1775436"/>
+                  </a:lnTo>
+                  <a:lnTo>
+                    <a:pt x="6517649" y="1781698"/>
+                  </a:lnTo>
+                  <a:lnTo>
+                    <a:pt x="6589272" y="1787826"/>
+                  </a:lnTo>
+                  <a:lnTo>
+                    <a:pt x="6660894" y="1793821"/>
+                  </a:lnTo>
+                  <a:lnTo>
+                    <a:pt x="6732517" y="1799688"/>
+                  </a:lnTo>
+                  <a:lnTo>
+                    <a:pt x="6804139" y="1805427"/>
+                  </a:lnTo>
+                  <a:lnTo>
+                    <a:pt x="6875762" y="1811043"/>
+                  </a:lnTo>
+                  <a:lnTo>
+                    <a:pt x="6947385" y="1816538"/>
+                  </a:lnTo>
+                  <a:lnTo>
+                    <a:pt x="7019007" y="1821914"/>
+                  </a:lnTo>
+                  <a:lnTo>
+                    <a:pt x="7090630" y="1827175"/>
                   </a:lnTo>
                 </a:path>
               </a:pathLst>
@@ -4405,7 +4405,7 @@
           </p:nvSpPr>
           <p:spPr>
             <a:xfrm>
-              <a:off x="4164901" y="2073503"/>
+              <a:off x="4170171" y="2073503"/>
               <a:ext cx="0" cy="3649639"/>
             </a:xfrm>
             <a:custGeom>
@@ -4678,7 +4678,7 @@
           </p:nvSpPr>
           <p:spPr>
             <a:xfrm>
-              <a:off x="2284877" y="5785772"/>
+              <a:off x="2285456" y="5785772"/>
               <a:ext cx="161574" cy="80101"/>
             </a:xfrm>
             <a:prstGeom prst="rect">
@@ -4724,7 +4724,7 @@
           </p:nvSpPr>
           <p:spPr>
             <a:xfrm>
-              <a:off x="4138944" y="5785772"/>
+              <a:off x="4139043" y="5785772"/>
               <a:ext cx="62179" cy="80101"/>
             </a:xfrm>
             <a:prstGeom prst="rect">
@@ -4770,7 +4770,7 @@
           </p:nvSpPr>
           <p:spPr>
             <a:xfrm>
-              <a:off x="5912223" y="5785772"/>
+              <a:off x="5911843" y="5785772"/>
               <a:ext cx="124358" cy="80101"/>
             </a:xfrm>
             <a:prstGeom prst="rect">
@@ -4816,7 +4816,7 @@
           </p:nvSpPr>
           <p:spPr>
             <a:xfrm>
-              <a:off x="7716592" y="5785772"/>
+              <a:off x="7715733" y="5785772"/>
               <a:ext cx="124358" cy="80101"/>
             </a:xfrm>
             <a:prstGeom prst="rect">
@@ -4987,7 +4987,7 @@
                   <a:latin typeface="Helvetica"/>
                   <a:cs typeface="Helvetica"/>
                 </a:rPr>
-                <a:t>subHR per 10 % decline: 1.29 (0.61-2.71), p_Bonf = 1.000 (n = 6)  |  per IQR decline (Δ = 27.4 %): 2.01 (0.26-15.43)  |  IQR: [-12.6, 14.8] %</a:t>
+                <a:t>subHR per 10 % decline: 1.32 (0.62-2.81), p_Bonf = 1.000 (n = 6)  |  per IQR decline (Δ = 27.2 %): 2.11 (0.27-16.57)  |  IQR: [-12.3, 14.9] %</a:t>
               </a:r>
             </a:p>
           </p:txBody>
